--- a/Slides.pptx
+++ b/Slides.pptx
@@ -264,7 +264,7 @@
           <a:p>
             <a:fld id="{2F598FE8-610D-4628-AF37-AB11EA0DA6DB}" type="datetimeFigureOut">
               <a:rPr lang="en-US" smtClean="0"/>
-              <a:t>2/21/2025</a:t>
+              <a:t>3/7/2025</a:t>
             </a:fld>
             <a:endParaRPr lang="en-US"/>
           </a:p>
@@ -462,7 +462,7 @@
           <a:p>
             <a:fld id="{2F598FE8-610D-4628-AF37-AB11EA0DA6DB}" type="datetimeFigureOut">
               <a:rPr lang="en-US" smtClean="0"/>
-              <a:t>2/21/2025</a:t>
+              <a:t>3/7/2025</a:t>
             </a:fld>
             <a:endParaRPr lang="en-US"/>
           </a:p>
@@ -670,7 +670,7 @@
           <a:p>
             <a:fld id="{2F598FE8-610D-4628-AF37-AB11EA0DA6DB}" type="datetimeFigureOut">
               <a:rPr lang="en-US" smtClean="0"/>
-              <a:t>2/21/2025</a:t>
+              <a:t>3/7/2025</a:t>
             </a:fld>
             <a:endParaRPr lang="en-US"/>
           </a:p>
@@ -868,7 +868,7 @@
           <a:p>
             <a:fld id="{2F598FE8-610D-4628-AF37-AB11EA0DA6DB}" type="datetimeFigureOut">
               <a:rPr lang="en-US" smtClean="0"/>
-              <a:t>2/21/2025</a:t>
+              <a:t>3/7/2025</a:t>
             </a:fld>
             <a:endParaRPr lang="en-US"/>
           </a:p>
@@ -1143,7 +1143,7 @@
           <a:p>
             <a:fld id="{2F598FE8-610D-4628-AF37-AB11EA0DA6DB}" type="datetimeFigureOut">
               <a:rPr lang="en-US" smtClean="0"/>
-              <a:t>2/21/2025</a:t>
+              <a:t>3/7/2025</a:t>
             </a:fld>
             <a:endParaRPr lang="en-US"/>
           </a:p>
@@ -1408,7 +1408,7 @@
           <a:p>
             <a:fld id="{2F598FE8-610D-4628-AF37-AB11EA0DA6DB}" type="datetimeFigureOut">
               <a:rPr lang="en-US" smtClean="0"/>
-              <a:t>2/21/2025</a:t>
+              <a:t>3/7/2025</a:t>
             </a:fld>
             <a:endParaRPr lang="en-US"/>
           </a:p>
@@ -1820,7 +1820,7 @@
           <a:p>
             <a:fld id="{2F598FE8-610D-4628-AF37-AB11EA0DA6DB}" type="datetimeFigureOut">
               <a:rPr lang="en-US" smtClean="0"/>
-              <a:t>2/21/2025</a:t>
+              <a:t>3/7/2025</a:t>
             </a:fld>
             <a:endParaRPr lang="en-US"/>
           </a:p>
@@ -1961,7 +1961,7 @@
           <a:p>
             <a:fld id="{2F598FE8-610D-4628-AF37-AB11EA0DA6DB}" type="datetimeFigureOut">
               <a:rPr lang="en-US" smtClean="0"/>
-              <a:t>2/21/2025</a:t>
+              <a:t>3/7/2025</a:t>
             </a:fld>
             <a:endParaRPr lang="en-US"/>
           </a:p>
@@ -2074,7 +2074,7 @@
           <a:p>
             <a:fld id="{2F598FE8-610D-4628-AF37-AB11EA0DA6DB}" type="datetimeFigureOut">
               <a:rPr lang="en-US" smtClean="0"/>
-              <a:t>2/21/2025</a:t>
+              <a:t>3/7/2025</a:t>
             </a:fld>
             <a:endParaRPr lang="en-US"/>
           </a:p>
@@ -2385,7 +2385,7 @@
           <a:p>
             <a:fld id="{2F598FE8-610D-4628-AF37-AB11EA0DA6DB}" type="datetimeFigureOut">
               <a:rPr lang="en-US" smtClean="0"/>
-              <a:t>2/21/2025</a:t>
+              <a:t>3/7/2025</a:t>
             </a:fld>
             <a:endParaRPr lang="en-US"/>
           </a:p>
@@ -2673,7 +2673,7 @@
           <a:p>
             <a:fld id="{2F598FE8-610D-4628-AF37-AB11EA0DA6DB}" type="datetimeFigureOut">
               <a:rPr lang="en-US" smtClean="0"/>
-              <a:t>2/21/2025</a:t>
+              <a:t>3/7/2025</a:t>
             </a:fld>
             <a:endParaRPr lang="en-US"/>
           </a:p>
@@ -2914,7 +2914,7 @@
           <a:p>
             <a:fld id="{2F598FE8-610D-4628-AF37-AB11EA0DA6DB}" type="datetimeFigureOut">
               <a:rPr lang="en-US" smtClean="0"/>
-              <a:t>2/21/2025</a:t>
+              <a:t>3/7/2025</a:t>
             </a:fld>
             <a:endParaRPr lang="en-US"/>
           </a:p>
@@ -3556,21 +3556,7 @@
             <a:pPr marL="282575" indent="-282575"/>
             <a:r>
               <a:rPr lang="en-US" sz="3200"/>
-              <a:t>3. Secure Coding Basics</a:t>
-            </a:r>
-          </a:p>
-          <a:p>
-            <a:pPr marL="739775" lvl="1" indent="-282575"/>
-            <a:r>
-              <a:rPr lang="en-US" sz="2800"/>
-              <a:t>Input validation</a:t>
-            </a:r>
-          </a:p>
-          <a:p>
-            <a:pPr marL="739775" lvl="1" indent="-282575"/>
-            <a:r>
-              <a:rPr lang="en-US" sz="2800"/>
-              <a:t>Python coding style guidelines for maintainable code</a:t>
+              <a:t>3. Code style guidelines for maintainable code</a:t>
             </a:r>
           </a:p>
         </p:txBody>
@@ -3633,7 +3619,7 @@
           <a:p>
             <a:r>
               <a:rPr lang="en-US"/>
-              <a:t>Day 2: Data Structures</a:t>
+              <a:t>Day 2: Secure Coding Practices &amp; Data Structures</a:t>
             </a:r>
           </a:p>
         </p:txBody>
@@ -3656,20 +3642,20 @@
         </p:nvSpPr>
         <p:spPr>
           <a:xfrm>
-            <a:off x="838200" y="1256232"/>
-            <a:ext cx="10515600" cy="4920731"/>
+            <a:off x="838200" y="1648918"/>
+            <a:ext cx="10515600" cy="4528045"/>
           </a:xfrm>
         </p:spPr>
         <p:txBody>
           <a:bodyPr>
-            <a:normAutofit/>
+            <a:normAutofit fontScale="92500" lnSpcReduction="10000"/>
           </a:bodyPr>
           <a:lstStyle/>
           <a:p>
             <a:pPr marL="282575" indent="-282575"/>
             <a:r>
               <a:rPr lang="en-US"/>
-              <a:t>Loops, Lists, Tuples, Dictionaries</a:t>
+              <a:t>Loops, Lists, Tuples, and Dictionaries</a:t>
             </a:r>
           </a:p>
           <a:p>
@@ -3684,6 +3670,13 @@
             <a:r>
               <a:rPr lang="en-US"/>
               <a:t>Secure Data Handling:</a:t>
+            </a:r>
+          </a:p>
+          <a:p>
+            <a:pPr marL="739775" lvl="1" indent="-282575"/>
+            <a:r>
+              <a:rPr lang="en-US"/>
+              <a:t>input validation</a:t>
             </a:r>
           </a:p>
           <a:p>

--- a/Slides.pptx
+++ b/Slides.pptx
@@ -264,7 +264,7 @@
           <a:p>
             <a:fld id="{2F598FE8-610D-4628-AF37-AB11EA0DA6DB}" type="datetimeFigureOut">
               <a:rPr lang="en-US" smtClean="0"/>
-              <a:t>3/7/2025</a:t>
+              <a:t>3/19/2025</a:t>
             </a:fld>
             <a:endParaRPr lang="en-US"/>
           </a:p>
@@ -462,7 +462,7 @@
           <a:p>
             <a:fld id="{2F598FE8-610D-4628-AF37-AB11EA0DA6DB}" type="datetimeFigureOut">
               <a:rPr lang="en-US" smtClean="0"/>
-              <a:t>3/7/2025</a:t>
+              <a:t>3/19/2025</a:t>
             </a:fld>
             <a:endParaRPr lang="en-US"/>
           </a:p>
@@ -670,7 +670,7 @@
           <a:p>
             <a:fld id="{2F598FE8-610D-4628-AF37-AB11EA0DA6DB}" type="datetimeFigureOut">
               <a:rPr lang="en-US" smtClean="0"/>
-              <a:t>3/7/2025</a:t>
+              <a:t>3/19/2025</a:t>
             </a:fld>
             <a:endParaRPr lang="en-US"/>
           </a:p>
@@ -868,7 +868,7 @@
           <a:p>
             <a:fld id="{2F598FE8-610D-4628-AF37-AB11EA0DA6DB}" type="datetimeFigureOut">
               <a:rPr lang="en-US" smtClean="0"/>
-              <a:t>3/7/2025</a:t>
+              <a:t>3/19/2025</a:t>
             </a:fld>
             <a:endParaRPr lang="en-US"/>
           </a:p>
@@ -1143,7 +1143,7 @@
           <a:p>
             <a:fld id="{2F598FE8-610D-4628-AF37-AB11EA0DA6DB}" type="datetimeFigureOut">
               <a:rPr lang="en-US" smtClean="0"/>
-              <a:t>3/7/2025</a:t>
+              <a:t>3/19/2025</a:t>
             </a:fld>
             <a:endParaRPr lang="en-US"/>
           </a:p>
@@ -1408,7 +1408,7 @@
           <a:p>
             <a:fld id="{2F598FE8-610D-4628-AF37-AB11EA0DA6DB}" type="datetimeFigureOut">
               <a:rPr lang="en-US" smtClean="0"/>
-              <a:t>3/7/2025</a:t>
+              <a:t>3/19/2025</a:t>
             </a:fld>
             <a:endParaRPr lang="en-US"/>
           </a:p>
@@ -1820,7 +1820,7 @@
           <a:p>
             <a:fld id="{2F598FE8-610D-4628-AF37-AB11EA0DA6DB}" type="datetimeFigureOut">
               <a:rPr lang="en-US" smtClean="0"/>
-              <a:t>3/7/2025</a:t>
+              <a:t>3/19/2025</a:t>
             </a:fld>
             <a:endParaRPr lang="en-US"/>
           </a:p>
@@ -1961,7 +1961,7 @@
           <a:p>
             <a:fld id="{2F598FE8-610D-4628-AF37-AB11EA0DA6DB}" type="datetimeFigureOut">
               <a:rPr lang="en-US" smtClean="0"/>
-              <a:t>3/7/2025</a:t>
+              <a:t>3/19/2025</a:t>
             </a:fld>
             <a:endParaRPr lang="en-US"/>
           </a:p>
@@ -2074,7 +2074,7 @@
           <a:p>
             <a:fld id="{2F598FE8-610D-4628-AF37-AB11EA0DA6DB}" type="datetimeFigureOut">
               <a:rPr lang="en-US" smtClean="0"/>
-              <a:t>3/7/2025</a:t>
+              <a:t>3/19/2025</a:t>
             </a:fld>
             <a:endParaRPr lang="en-US"/>
           </a:p>
@@ -2385,7 +2385,7 @@
           <a:p>
             <a:fld id="{2F598FE8-610D-4628-AF37-AB11EA0DA6DB}" type="datetimeFigureOut">
               <a:rPr lang="en-US" smtClean="0"/>
-              <a:t>3/7/2025</a:t>
+              <a:t>3/19/2025</a:t>
             </a:fld>
             <a:endParaRPr lang="en-US"/>
           </a:p>
@@ -2673,7 +2673,7 @@
           <a:p>
             <a:fld id="{2F598FE8-610D-4628-AF37-AB11EA0DA6DB}" type="datetimeFigureOut">
               <a:rPr lang="en-US" smtClean="0"/>
-              <a:t>3/7/2025</a:t>
+              <a:t>3/19/2025</a:t>
             </a:fld>
             <a:endParaRPr lang="en-US"/>
           </a:p>
@@ -2914,7 +2914,7 @@
           <a:p>
             <a:fld id="{2F598FE8-610D-4628-AF37-AB11EA0DA6DB}" type="datetimeFigureOut">
               <a:rPr lang="en-US" smtClean="0"/>
-              <a:t>3/7/2025</a:t>
+              <a:t>3/19/2025</a:t>
             </a:fld>
             <a:endParaRPr lang="en-US"/>
           </a:p>
@@ -3609,8 +3609,8 @@
         </p:nvSpPr>
         <p:spPr>
           <a:xfrm>
-            <a:off x="838200" y="248303"/>
-            <a:ext cx="10515600" cy="865468"/>
+            <a:off x="487179" y="398205"/>
+            <a:ext cx="11422505" cy="865468"/>
           </a:xfrm>
         </p:spPr>
         <p:txBody>

--- a/Slides.pptx
+++ b/Slides.pptx
@@ -264,7 +264,7 @@
           <a:p>
             <a:fld id="{2F598FE8-610D-4628-AF37-AB11EA0DA6DB}" type="datetimeFigureOut">
               <a:rPr lang="en-US" smtClean="0"/>
-              <a:t>3/19/2025</a:t>
+              <a:t>4/5/2025</a:t>
             </a:fld>
             <a:endParaRPr lang="en-US"/>
           </a:p>
@@ -462,7 +462,7 @@
           <a:p>
             <a:fld id="{2F598FE8-610D-4628-AF37-AB11EA0DA6DB}" type="datetimeFigureOut">
               <a:rPr lang="en-US" smtClean="0"/>
-              <a:t>3/19/2025</a:t>
+              <a:t>4/5/2025</a:t>
             </a:fld>
             <a:endParaRPr lang="en-US"/>
           </a:p>
@@ -670,7 +670,7 @@
           <a:p>
             <a:fld id="{2F598FE8-610D-4628-AF37-AB11EA0DA6DB}" type="datetimeFigureOut">
               <a:rPr lang="en-US" smtClean="0"/>
-              <a:t>3/19/2025</a:t>
+              <a:t>4/5/2025</a:t>
             </a:fld>
             <a:endParaRPr lang="en-US"/>
           </a:p>
@@ -868,7 +868,7 @@
           <a:p>
             <a:fld id="{2F598FE8-610D-4628-AF37-AB11EA0DA6DB}" type="datetimeFigureOut">
               <a:rPr lang="en-US" smtClean="0"/>
-              <a:t>3/19/2025</a:t>
+              <a:t>4/5/2025</a:t>
             </a:fld>
             <a:endParaRPr lang="en-US"/>
           </a:p>
@@ -1143,7 +1143,7 @@
           <a:p>
             <a:fld id="{2F598FE8-610D-4628-AF37-AB11EA0DA6DB}" type="datetimeFigureOut">
               <a:rPr lang="en-US" smtClean="0"/>
-              <a:t>3/19/2025</a:t>
+              <a:t>4/5/2025</a:t>
             </a:fld>
             <a:endParaRPr lang="en-US"/>
           </a:p>
@@ -1408,7 +1408,7 @@
           <a:p>
             <a:fld id="{2F598FE8-610D-4628-AF37-AB11EA0DA6DB}" type="datetimeFigureOut">
               <a:rPr lang="en-US" smtClean="0"/>
-              <a:t>3/19/2025</a:t>
+              <a:t>4/5/2025</a:t>
             </a:fld>
             <a:endParaRPr lang="en-US"/>
           </a:p>
@@ -1820,7 +1820,7 @@
           <a:p>
             <a:fld id="{2F598FE8-610D-4628-AF37-AB11EA0DA6DB}" type="datetimeFigureOut">
               <a:rPr lang="en-US" smtClean="0"/>
-              <a:t>3/19/2025</a:t>
+              <a:t>4/5/2025</a:t>
             </a:fld>
             <a:endParaRPr lang="en-US"/>
           </a:p>
@@ -1961,7 +1961,7 @@
           <a:p>
             <a:fld id="{2F598FE8-610D-4628-AF37-AB11EA0DA6DB}" type="datetimeFigureOut">
               <a:rPr lang="en-US" smtClean="0"/>
-              <a:t>3/19/2025</a:t>
+              <a:t>4/5/2025</a:t>
             </a:fld>
             <a:endParaRPr lang="en-US"/>
           </a:p>
@@ -2074,7 +2074,7 @@
           <a:p>
             <a:fld id="{2F598FE8-610D-4628-AF37-AB11EA0DA6DB}" type="datetimeFigureOut">
               <a:rPr lang="en-US" smtClean="0"/>
-              <a:t>3/19/2025</a:t>
+              <a:t>4/5/2025</a:t>
             </a:fld>
             <a:endParaRPr lang="en-US"/>
           </a:p>
@@ -2385,7 +2385,7 @@
           <a:p>
             <a:fld id="{2F598FE8-610D-4628-AF37-AB11EA0DA6DB}" type="datetimeFigureOut">
               <a:rPr lang="en-US" smtClean="0"/>
-              <a:t>3/19/2025</a:t>
+              <a:t>4/5/2025</a:t>
             </a:fld>
             <a:endParaRPr lang="en-US"/>
           </a:p>
@@ -2673,7 +2673,7 @@
           <a:p>
             <a:fld id="{2F598FE8-610D-4628-AF37-AB11EA0DA6DB}" type="datetimeFigureOut">
               <a:rPr lang="en-US" smtClean="0"/>
-              <a:t>3/19/2025</a:t>
+              <a:t>4/5/2025</a:t>
             </a:fld>
             <a:endParaRPr lang="en-US"/>
           </a:p>
@@ -2914,7 +2914,7 @@
           <a:p>
             <a:fld id="{2F598FE8-610D-4628-AF37-AB11EA0DA6DB}" type="datetimeFigureOut">
               <a:rPr lang="en-US" smtClean="0"/>
-              <a:t>3/19/2025</a:t>
+              <a:t>4/5/2025</a:t>
             </a:fld>
             <a:endParaRPr lang="en-US"/>
           </a:p>
@@ -3614,12 +3614,14 @@
           </a:xfrm>
         </p:spPr>
         <p:txBody>
-          <a:bodyPr/>
-          <a:lstStyle/>
-          <a:p>
-            <a:r>
-              <a:rPr lang="en-US"/>
-              <a:t>Day 2: Secure Coding Practices &amp; Data Structures</a:t>
+          <a:bodyPr>
+            <a:noAutofit/>
+          </a:bodyPr>
+          <a:lstStyle/>
+          <a:p>
+            <a:r>
+              <a:rPr lang="en-US" sz="4000"/>
+              <a:t>Day 2: Secure Coding Practices and Data Structures</a:t>
             </a:r>
           </a:p>
         </p:txBody>
@@ -3947,7 +3949,7 @@
           <a:p>
             <a:r>
               <a:rPr lang="en-US"/>
-              <a:t>Day 4: Cryptography</a:t>
+              <a:t>Day 4: Cryptography, APIs, and Static Analysis</a:t>
             </a:r>
           </a:p>
         </p:txBody>
@@ -4066,7 +4068,7 @@
           <a:p>
             <a:r>
               <a:rPr lang="en-US"/>
-              <a:t>Day 5: Secure Software Practices</a:t>
+              <a:t>Day 5: Secure Software Processes</a:t>
             </a:r>
           </a:p>
         </p:txBody>
@@ -4102,14 +4104,14 @@
             <a:pPr marL="282575" indent="-282575"/>
             <a:r>
               <a:rPr lang="en-US" sz="3200"/>
-              <a:t>Secure Software Practices</a:t>
+              <a:t>Threat modeling</a:t>
             </a:r>
           </a:p>
           <a:p>
             <a:pPr marL="282575" indent="-282575"/>
             <a:r>
               <a:rPr lang="en-US" sz="3200"/>
-              <a:t>Threat modeling and secure workflows</a:t>
+              <a:t>Secure workflows</a:t>
             </a:r>
           </a:p>
           <a:p>
